--- a/dist/초2/국어/대화와매체/초2_국어_대화와매체_03_바르고고운말_학생용.pptx
+++ b/dist/초2/국어/대화와매체/초2_국어_대화와매체_03_바르고고운말_학생용.pptx
@@ -119,13 +119,13 @@
   <p:extLst>
     <p:ext uri="{521415D9-36F7-43E2-AB2F-B90AF26B5E84}">
       <p14:sectionLst xmlns:p14="http://schemas.microsoft.com/office/powerpoint/2010/main">
-        <p14:section name="도입" id="{6a02f46f-b6e4-bef3-9a11-21cec8e47989}">
+        <p14:section name="도입" id="{976553e2-6df4-6a2f-77f9-99100d20d591}">
           <p14:sldIdLst>
             <p14:sldId id="256"/>
             <p14:sldId id="257"/>
           </p14:sldIdLst>
         </p14:section>
-        <p14:section name="개념" id="{0c14a540-4c31-49bb-5b31-ca87779cd1e1}">
+        <p14:section name="개념" id="{952c4351-beef-ed89-3647-e2dedac14188}">
           <p14:sldIdLst>
             <p14:sldId id="258"/>
             <p14:sldId id="259"/>
@@ -133,31 +133,31 @@
             <p14:sldId id="263"/>
           </p14:sldIdLst>
         </p14:section>
-        <p14:section name="연습" id="{2fe6cbdb-a3a8-0727-1621-301d2e50970c}">
+        <p14:section name="연습" id="{42c21a98-c450-3e25-c018-b8687f28e57c}">
           <p14:sldIdLst>
             <p14:sldId id="261"/>
             <p14:sldId id="262"/>
             <p14:sldId id="264"/>
           </p14:sldIdLst>
         </p14:section>
-        <p14:section name="개념" id="{fdf878b7-8069-d154-b149-231e4437d83c}">
+        <p14:section name="개념" id="{6d51b1f2-7d22-8a7a-22fa-b2b5451f893c}">
           <p14:sldIdLst/>
         </p14:section>
-        <p14:section name="연습" id="{a3fdf973-5816-90d2-2309-cf5d41a5908c}">
+        <p14:section name="연습" id="{7c138e90-fbee-857b-4e42-956160e89bf6}">
           <p14:sldIdLst/>
         </p14:section>
-        <p14:section name="확인" id="{a5db13f0-76ce-853a-5235-33f89b016fa7}">
+        <p14:section name="확인" id="{a017e82c-0eda-0938-8965-6fec13cd7718}">
           <p14:sldIdLst>
             <p14:sldId id="265"/>
             <p14:sldId id="266"/>
           </p14:sldIdLst>
         </p14:section>
-        <p14:section name="정리" id="{d8d8c2b4-64e7-e59c-3ddb-3bbdf9424bb7}">
+        <p14:section name="정리" id="{b1f1bfd3-01de-9dd0-0c34-f4cce7fe1ca3}">
           <p14:sldIdLst>
             <p14:sldId id="267"/>
           </p14:sldIdLst>
         </p14:section>
-        <p14:section name="보충" id="{af1192ad-b67f-ad13-3765-0ff5fe40fef3}">
+        <p14:section name="보충" id="{ad502def-971a-2d3b-70bc-279b22c74862}">
           <p14:sldIdLst>
             <p14:sldId id="268"/>
           </p14:sldIdLst>
@@ -5248,12 +5248,12 @@
         </p:nvSpPr>
         <p:spPr>
           <a:xfrm>
-            <a:off x="548640" y="5349240"/>
-            <a:ext cx="11091672" cy="868680"/>
+            <a:off x="548640" y="4897120"/>
+            <a:ext cx="11091672" cy="1320800"/>
           </a:xfrm>
           <a:prstGeom prst="roundRect">
             <a:avLst>
-              <a:gd name="adj" fmla="val 12632"/>
+              <a:gd name="adj" fmla="val 8308"/>
             </a:avLst>
           </a:prstGeom>
           <a:solidFill>
@@ -5275,8 +5275,8 @@
         </p:nvSpPr>
         <p:spPr>
           <a:xfrm>
-            <a:off x="822960" y="5486400"/>
-            <a:ext cx="10543032" cy="594360"/>
+            <a:off x="822960" y="5034280"/>
+            <a:ext cx="10543032" cy="1046480"/>
           </a:xfrm>
           <a:prstGeom prst="rect">
             <a:avLst/>
@@ -5324,7 +5324,7 @@
           </p:nvPr>
         </p:nvGraphicFramePr>
         <p:xfrm>
-          <a:off x="1979676" y="2247900"/>
+          <a:off x="1979676" y="2052320"/>
           <a:ext cx="8229600" cy="914400"/>
         </p:xfrm>
         <a:graphic>
@@ -5335,7 +5335,7 @@
                 <a:gridCol w="2468880"/>
                 <a:gridCol w="5760720"/>
               </a:tblGrid>
-              <a:tr h="650240">
+              <a:tr h="629920">
                 <a:tc>
                   <a:txBody>
                     <a:bodyPr/>
@@ -5473,7 +5473,7 @@
                   </a:tcPr>
                 </a:tc>
               </a:tr>
-              <a:tr h="650240">
+              <a:tr h="629920">
                 <a:tc>
                   <a:txBody>
                     <a:bodyPr/>
@@ -5611,7 +5611,7 @@
                   </a:tcPr>
                 </a:tc>
               </a:tr>
-              <a:tr h="650240">
+              <a:tr h="629920">
                 <a:tc>
                   <a:txBody>
                     <a:bodyPr/>
@@ -5990,7 +5990,7 @@
           </p:nvPr>
         </p:nvGraphicFramePr>
         <p:xfrm>
-          <a:off x="2436876" y="2265680"/>
+          <a:off x="2436876" y="2306320"/>
           <a:ext cx="7315200" cy="914400"/>
         </p:xfrm>
         <a:graphic>
@@ -6001,7 +6001,7 @@
                 <a:gridCol w="2926080"/>
                 <a:gridCol w="4389120"/>
               </a:tblGrid>
-              <a:tr h="650240">
+              <a:tr h="629920">
                 <a:tc>
                   <a:txBody>
                     <a:bodyPr/>
@@ -6139,7 +6139,7 @@
                   </a:tcPr>
                 </a:tc>
               </a:tr>
-              <a:tr h="650240">
+              <a:tr h="629920">
                 <a:tc>
                   <a:txBody>
                     <a:bodyPr/>
@@ -6277,7 +6277,7 @@
                   </a:tcPr>
                 </a:tc>
               </a:tr>
-              <a:tr h="650240">
+              <a:tr h="629920">
                 <a:tc>
                   <a:txBody>
                     <a:bodyPr/>
@@ -6415,7 +6415,7 @@
                   </a:tcPr>
                 </a:tc>
               </a:tr>
-              <a:tr h="650240">
+              <a:tr h="629920">
                 <a:tc>
                   <a:txBody>
                     <a:bodyPr/>
